--- a/ai_social_science_lit/Cognitive Mind Meets the Artificial Linares Kevin UMD DC AAPOR 2025.pptx
+++ b/ai_social_science_lit/Cognitive Mind Meets the Artificial Linares Kevin UMD DC AAPOR 2025.pptx
@@ -143,8 +143,7 @@
 <file path=ppt/revisionInfo.xml><?xml version="1.0" encoding="utf-8"?>
 <p1510:revInfo xmlns:a="http://schemas.openxmlformats.org/drawingml/2006/main" xmlns:r="http://schemas.openxmlformats.org/officeDocument/2006/relationships" xmlns:p1510="http://schemas.microsoft.com/office/powerpoint/2015/10/main">
   <p1510:revLst>
-    <p1510:client id="{38E8CE1A-FB97-7A33-BDCD-8882D50D9BD3}" v="59" dt="2025-09-11T23:24:46.005"/>
-    <p1510:client id="{FD88F742-1B3E-00CF-BE1C-441AD5D542D1}" v="44" dt="2025-09-13T19:47:04.718"/>
+    <p1510:client id="{FD88F742-1B3E-00CF-BE1C-441AD5D542D1}" v="46" dt="2025-09-15T13:13:16.747"/>
   </p1510:revLst>
 </p1510:revInfo>
 </file>
@@ -3949,7 +3948,7 @@
           <a:p>
             <a:fld id="{D5EEE5CC-FD90-4388-9392-9DFD89A79B0F}" type="datetimeFigureOut">
               <a:rPr lang="en-US" smtClean="0"/>
-              <a:t>9/13/2025</a:t>
+              <a:t>9/15/2025</a:t>
             </a:fld>
             <a:endParaRPr lang="en-US"/>
           </a:p>
@@ -9469,10 +9468,10 @@
           <a:lstStyle/>
           <a:p>
             <a:r>
-              <a:rPr lang="en-US"/>
-              <a:t>Stage 3: Judgement Transformation</a:t>
-            </a:r>
-            <a:endParaRPr lang="en-US">
+              <a:rPr lang="en-US" dirty="0"/>
+              <a:t>Stage 3: Judgment Transformation</a:t>
+            </a:r>
+            <a:endParaRPr lang="en-US" dirty="0">
               <a:ea typeface="Calibri Light"/>
               <a:cs typeface="Calibri Light"/>
             </a:endParaRPr>
